--- a/bravecompany/브레이브컴퍼니_네이버광고_진단_제안서.pptx
+++ b/bravecompany/브레이브컴퍼니_네이버광고_진단_제안서.pptx
@@ -132,13 +132,13 @@
   <p:extLst>
     <p:ext uri="{521415D9-36F7-43E2-AB2F-B90AF26B5E84}">
       <p14:sectionLst xmlns:p14="http://schemas.microsoft.com/office/powerpoint/2010/main">
-        <p14:section name="표지" id="{25f961eb-f028-fd81-54d2-f8a6bb7aad7e}">
+        <p14:section name="표지" id="{cd8c15ea-e57b-6a84-24d9-2f79e3c32599}">
           <p14:sldIdLst>
             <p14:sldId id="256"/>
             <p14:sldId id="257"/>
           </p14:sldIdLst>
         </p14:section>
-        <p14:section name="01 진단 요약" id="{4feaea8d-be19-b473-f423-442c90c498ed}">
+        <p14:section name="01 진단 요약" id="{09b21ffc-c068-4ef4-b3dd-a09db63c0575}">
           <p14:sldIdLst>
             <p14:sldId id="258"/>
             <p14:sldId id="259"/>
@@ -146,7 +146,7 @@
             <p14:sldId id="261"/>
           </p14:sldIdLst>
         </p14:section>
-        <p14:section name="02 검색광고" id="{e89101d7-7595-d4c0-6dd4-e7eb85f9aede}">
+        <p14:section name="02 검색광고" id="{d53c19ad-39fe-e77a-e9e9-cc2b6e7e31b5}">
           <p14:sldIdLst>
             <p14:sldId id="262"/>
             <p14:sldId id="263"/>
@@ -157,7 +157,7 @@
             <p14:sldId id="268"/>
           </p14:sldIdLst>
         </p14:section>
-        <p14:section name="03 GFA" id="{8edd526e-9d67-ddfd-926e-ad6940d5be55}">
+        <p14:section name="03 GFA" id="{13851d47-eb74-c1f3-c43b-793d79655aec}">
           <p14:sldIdLst>
             <p14:sldId id="269"/>
             <p14:sldId id="270"/>
@@ -165,7 +165,7 @@
             <p14:sldId id="272"/>
           </p14:sldIdLst>
         </p14:section>
-        <p14:section name="04 개선 제안" id="{2600e61a-dea3-ff10-e975-e9990740bff6}">
+        <p14:section name="04 개선 제안" id="{ff1ef5f7-1c2b-b7e0-4faa-6492025c389f}">
           <p14:sldIdLst>
             <p14:sldId id="273"/>
             <p14:sldId id="274"/>
@@ -174,7 +174,7 @@
             <p14:sldId id="277"/>
           </p14:sldIdLst>
         </p14:section>
-        <p14:section name="부록" id="{c0a18474-474c-7053-f217-50840d70f6d5}">
+        <p14:section name="부록" id="{aefbdf82-857f-c861-aae4-2fa5b37cc27f}">
           <p14:sldIdLst>
             <p14:sldId id="278"/>
             <p14:sldId id="279"/>
@@ -3199,7 +3199,7 @@
             <a:r>
               <a:rPr lang="en-US" dirty="0"/>
               <a:t>검색어 보고서에서 구매가 0건인 검색어 중 브랜드명이 들어가지 않은 것을 비용 순으로 뽑은 목록입니다. 상위 20개가 모두 통영숙수 캠페인 검색어입니다.
-다른 회사 전복죽 브랜드나 '어떻게 하나요' 같은 질문형 검색어는 바로 제외하는 게 맞습니다.
+장우준, 김호준, 명품게우 같은 다른 회사 전복죽 브랜드나 '어떻게 하나요' 같은 질문형 검색어는 바로 제외하는 게 맞습니다.
 '죽', '냉동죽', '물회키트' 같은 일반 카테고리어는 구매는 없었지만 수요가 있는 말이라, 바로 제외하기보다 입찰과 매칭 방식을 먼저 조정하는 걸 권합니다.
 '꼬끼다'는 브랜드 오타라서, '전복죽'은 자사 핵심 상품명이고 전복죽 캠페인에서는 구매가 8건 있어서 목록에서 뺐습니다.</a:t>
             </a:r>
@@ -23744,7 +23744,7 @@
                         <a:buNone/>
                       </a:pPr>
                       <a:r>
-                        <a:rPr lang="en-US" sz="1200" dirty="0">
+                        <a:rPr lang="en-US" sz="1200" b="1" dirty="0">
                           <a:solidFill>
                             <a:srgbClr val="000000"/>
                           </a:solidFill>
@@ -23920,10 +23920,10 @@
                       <a:r>
                         <a:rPr lang="en-US" sz="1200" b="1" dirty="0">
                           <a:solidFill>
-                            <a:schemeClr val="accent2"/>
+                            <a:schemeClr val="accent1"/>
                           </a:solidFill>
                         </a:rPr>
-                        <a:t>검토</a:t>
+                        <a:t>제외 권장</a:t>
                       </a:r>
                       <a:endParaRPr lang="en-US" sz="1200" dirty="0"/>
                     </a:p>
@@ -23965,6 +23965,9 @@
                       <a:headEnd type="none" w="med" len="med"/>
                       <a:tailEnd type="none" w="med" len="med"/>
                     </a:lnB>
+                    <a:solidFill>
+                      <a:srgbClr val="FDE4DF"/>
+                    </a:solidFill>
                   </a:tcPr>
                 </a:tc>
               </a:tr>

--- a/bravecompany/브레이브컴퍼니_네이버광고_진단_제안서.pptx
+++ b/bravecompany/브레이브컴퍼니_네이버광고_진단_제안서.pptx
@@ -132,13 +132,13 @@
   <p:extLst>
     <p:ext uri="{521415D9-36F7-43E2-AB2F-B90AF26B5E84}">
       <p14:sectionLst xmlns:p14="http://schemas.microsoft.com/office/powerpoint/2010/main">
-        <p14:section name="표지" id="{cd8c15ea-e57b-6a84-24d9-2f79e3c32599}">
+        <p14:section name="표지" id="{e089350c-990d-fa35-86fc-fb33a35004ce}">
           <p14:sldIdLst>
             <p14:sldId id="256"/>
             <p14:sldId id="257"/>
           </p14:sldIdLst>
         </p14:section>
-        <p14:section name="01 진단 요약" id="{09b21ffc-c068-4ef4-b3dd-a09db63c0575}">
+        <p14:section name="01 진단 요약" id="{282e7499-a50b-cb51-7781-8be9c2849010}">
           <p14:sldIdLst>
             <p14:sldId id="258"/>
             <p14:sldId id="259"/>
@@ -146,7 +146,7 @@
             <p14:sldId id="261"/>
           </p14:sldIdLst>
         </p14:section>
-        <p14:section name="02 검색광고" id="{d53c19ad-39fe-e77a-e9e9-cc2b6e7e31b5}">
+        <p14:section name="02 검색광고" id="{8ceca181-3ed5-a22d-a9d4-fb16eda65ae1}">
           <p14:sldIdLst>
             <p14:sldId id="262"/>
             <p14:sldId id="263"/>
@@ -157,7 +157,7 @@
             <p14:sldId id="268"/>
           </p14:sldIdLst>
         </p14:section>
-        <p14:section name="03 GFA" id="{13851d47-eb74-c1f3-c43b-793d79655aec}">
+        <p14:section name="03 GFA" id="{386919c3-5807-9192-b354-a0509e61c76e}">
           <p14:sldIdLst>
             <p14:sldId id="269"/>
             <p14:sldId id="270"/>
@@ -165,7 +165,7 @@
             <p14:sldId id="272"/>
           </p14:sldIdLst>
         </p14:section>
-        <p14:section name="04 개선 제안" id="{ff1ef5f7-1c2b-b7e0-4faa-6492025c389f}">
+        <p14:section name="04 개선 제안" id="{4583baa5-e624-b37a-042d-fe9242c84c14}">
           <p14:sldIdLst>
             <p14:sldId id="273"/>
             <p14:sldId id="274"/>
@@ -174,7 +174,7 @@
             <p14:sldId id="277"/>
           </p14:sldIdLst>
         </p14:section>
-        <p14:section name="부록" id="{aefbdf82-857f-c861-aae4-2fa5b37cc27f}">
+        <p14:section name="부록" id="{743408d7-d51c-991e-714c-71c42bce1caa}">
           <p14:sldIdLst>
             <p14:sldId id="278"/>
             <p14:sldId id="279"/>
@@ -12425,7 +12425,7 @@
                   <a:schemeClr val="accent2"/>
                 </a:solidFill>
               </a:rPr>
-              <a:t>삭제된 통영숙수 전복죽 ADVoost 2개 (네이버·자사몰): 209만 원, ROAS 156%</a:t>
+              <a:t>삭제된 통영숙수 전복죽 ADVoost 2개 (네이버·자사몰): 209만 원, ROAS 157%</a:t>
             </a:r>
             <a:endParaRPr lang="en-US" sz="1400" dirty="0"/>
           </a:p>
